--- a/Training Materials/14. ReactJS/Slides/7. Conditional Rendering and Shared State/conditional-rendering-and-shared-state-slides.pptx
+++ b/Training Materials/14. ReactJS/Slides/7. Conditional Rendering and Shared State/conditional-rendering-and-shared-state-slides.pptx
@@ -225,7 +225,7 @@
           <a:p>
             <a:fld id="{25A26F48-7468-4FE9-8AD8-20FC14FEBB95}" type="datetimeFigureOut">
               <a:rPr lang="en-IN" smtClean="0"/>
-              <a:t>27-10-2024</a:t>
+              <a:t>18-09-2025</a:t>
             </a:fld>
             <a:endParaRPr lang="en-IN"/>
           </a:p>
@@ -630,9 +630,9 @@
             </a:lvl1pPr>
           </a:lstStyle>
           <a:p>
-            <a:fld id="{A0E66D5A-3A7B-49C7-8CE0-629CB77389FA}" type="datetime1">
+            <a:fld id="{C2BD3EC6-8CAE-410B-8A6C-3C1DB568A585}" type="datetime1">
               <a:rPr lang="en-US" smtClean="0"/>
-              <a:t>10/27/2024</a:t>
+              <a:t>9/18/2025</a:t>
             </a:fld>
             <a:endParaRPr lang="en-US"/>
           </a:p>
@@ -807,9 +807,9 @@
             </a:lvl1pPr>
           </a:lstStyle>
           <a:p>
-            <a:fld id="{A4F807EA-E307-4666-AD97-6CC83537D3D3}" type="datetime1">
+            <a:fld id="{F9A973F7-92FF-4FA3-B0F4-E589761799D0}" type="datetime1">
               <a:rPr lang="en-US" smtClean="0"/>
-              <a:t>10/27/2024</a:t>
+              <a:t>9/18/2025</a:t>
             </a:fld>
             <a:endParaRPr lang="en-US"/>
           </a:p>
@@ -1021,9 +1021,9 @@
             </a:lvl1pPr>
           </a:lstStyle>
           <a:p>
-            <a:fld id="{3B18E26D-C535-48C5-B892-A07F9394A6A1}" type="datetime1">
+            <a:fld id="{C1E4C326-B31E-4EBE-A7FE-CFF1A339EDCA}" type="datetime1">
               <a:rPr lang="en-US" smtClean="0"/>
-              <a:t>10/27/2024</a:t>
+              <a:t>9/18/2025</a:t>
             </a:fld>
             <a:endParaRPr lang="en-US"/>
           </a:p>
@@ -1177,9 +1177,9 @@
             </a:lvl1pPr>
           </a:lstStyle>
           <a:p>
-            <a:fld id="{CAE58F0F-1869-44DB-BD32-3BE148F4807D}" type="datetime1">
+            <a:fld id="{97EE9B2F-23BC-4E64-B856-7101E6386A4D}" type="datetime1">
               <a:rPr lang="en-US" smtClean="0"/>
-              <a:t>10/27/2024</a:t>
+              <a:t>9/18/2025</a:t>
             </a:fld>
             <a:endParaRPr lang="en-US"/>
           </a:p>
@@ -1296,9 +1296,9 @@
             </a:lvl1pPr>
           </a:lstStyle>
           <a:p>
-            <a:fld id="{60DEE28A-6276-4F7A-93E1-2D3134F54929}" type="datetime1">
+            <a:fld id="{0D3E9519-C398-46DC-8DC1-634C9AE0AD77}" type="datetime1">
               <a:rPr lang="en-US" smtClean="0"/>
-              <a:t>10/27/2024</a:t>
+              <a:t>9/18/2025</a:t>
             </a:fld>
             <a:endParaRPr lang="en-US"/>
           </a:p>
@@ -1521,9 +1521,9 @@
             </a:lvl1pPr>
           </a:lstStyle>
           <a:p>
-            <a:fld id="{B10154A8-4330-462F-9CE2-809DB790462F}" type="datetime1">
+            <a:fld id="{EF2A1413-9AD9-45D7-94B8-2897C3384929}" type="datetime1">
               <a:rPr lang="en-US" smtClean="0"/>
-              <a:t>10/27/2024</a:t>
+              <a:t>9/18/2025</a:t>
             </a:fld>
             <a:endParaRPr lang="en-US"/>
           </a:p>
